--- a/submit/[RF팀] 평생 자산관리 AI Agent MVP제안서.pptx
+++ b/submit/[RF팀] 평생 자산관리 AI Agent MVP제안서.pptx
@@ -17235,6 +17235,28 @@
               <a:t>  고령층 UI 접근성 → Slow Banking UI (구간 선택, 큰 글씨, 고대비)</a:t>
             </a:r>
           </a:p>
+          <a:p>
+            <a:pPr marL="0" indent="0"/>
+            <a:r>
+              <a:rPr lang="ko-KR" sz="1300">
+                <a:solidFill>
+                  <a:srgbClr val="1E1E1E"/>
+                </a:solidFill>
+              </a:rPr>
+              <a:t>  GitHub: https://github.com/choseohyeon/JBagent</a:t>
+            </a:r>
+          </a:p>
+          <a:p>
+            <a:pPr marL="0" indent="0"/>
+            <a:r>
+              <a:rPr lang="ko-KR" sz="1300">
+                <a:solidFill>
+                  <a:srgbClr val="1E1E1E"/>
+                </a:solidFill>
+              </a:rPr>
+              <a:t>  배포 URL: https://jbagent-igjf4uinkqxp4gw9nwagnf.streamlit.app/</a:t>
+            </a:r>
+          </a:p>
         </p:txBody>
       </p:sp>
       <p:cxnSp>

--- a/submit/[RF팀] 평생 자산관리 AI Agent MVP제안서.pptx
+++ b/submit/[RF팀] 평생 자산관리 AI Agent MVP제안서.pptx
@@ -15179,7 +15179,7 @@
                   <a:srgbClr val="1E1E1E"/>
                 </a:solidFill>
               </a:rPr>
-              <a:t>    통계청 국민생명표·가계금융복지조사 / 한국은행 ECOS API(금리·CPI) / KRX KOSPI·KOSPI200·KTB 채권지수</a:t>
+              <a:t>    통계청 국민생명표·가계금융복지조사 / 한국은행 ECOS(금리·CPI) / KRX 수익률</a:t>
             </a:r>
           </a:p>
           <a:p>
@@ -15212,18 +15212,7 @@
                   <a:srgbClr val="1E1E1E"/>
                 </a:solidFill>
               </a:rPr>
-              <a:t>    생존분석(Cox PH) · Monte Carlo 10,000회 · CVaR 포트폴리오 최적화</a:t>
-            </a:r>
-          </a:p>
-          <a:p>
-            <a:pPr marL="0" indent="0"/>
-            <a:r>
-              <a:rPr lang="ko-KR" sz="1300">
-                <a:solidFill>
-                  <a:srgbClr val="1E1E1E"/>
-                </a:solidFill>
-              </a:rPr>
-              <a:t>    국민연금 전략 최적화 · K-means 군집 분석 · 이상 거래 탐지</a:t>
+              <a:t>    생존분석 · Monte Carlo 10,000회 · CVaR · 연금최적화 · K-means · 이상탐지</a:t>
             </a:r>
           </a:p>
           <a:p>
@@ -15257,17 +15246,6 @@
                 </a:solidFill>
               </a:rPr>
               <a:t>    llama-3.1-8b-instant — Tool 선택·실행·한국어 응답 생성 (단일 모델, 무료 API)</a:t>
-            </a:r>
-          </a:p>
-          <a:p>
-            <a:pPr marL="0" indent="0"/>
-            <a:r>
-              <a:rPr lang="ko-KR" sz="1300">
-                <a:solidFill>
-                  <a:srgbClr val="1E1E1E"/>
-                </a:solidFill>
-              </a:rPr>
-              <a:t>    Rate Limit 에러 처리 / 범위 외 질문 키워드 사전 필터</a:t>
             </a:r>
           </a:p>
           <a:p>
@@ -17133,7 +17111,7 @@
                   <a:srgbClr val="1E1E1E"/>
                 </a:solidFill>
               </a:rPr>
-              <a:t>  통계 모델:  lifelines · scipy · numpy · cvxpy · scikit-learn · statsmodels · ruptures</a:t>
+              <a:t>  통계 모델:  lifelines · scipy · cvxpy · scikit-learn · statsmodels · ruptures</a:t>
             </a:r>
           </a:p>
           <a:p>
@@ -17144,7 +17122,7 @@
                   <a:srgbClr val="1E1E1E"/>
                 </a:solidFill>
               </a:rPr>
-              <a:t>  AI Agent:  Groq API (llama-3.1-8b-instant, 무료 500K TPD) — Tool Use + 한국어 생성 단일 모델</a:t>
+              <a:t>  AI Agent:  Groq API (llama-3.1-8b-instant) — Tool Use + 한국어 응답 생성</a:t>
             </a:r>
           </a:p>
           <a:p>
@@ -17221,29 +17199,7 @@
                   <a:srgbClr val="1E1E1E"/>
                 </a:solidFill>
               </a:rPr>
-              <a:t>  Rate Limit 대응 → try/except로 429 에러 포착 후 한국어 안내 메시지 반환</a:t>
-            </a:r>
-          </a:p>
-          <a:p>
-            <a:pPr marL="0" indent="0"/>
-            <a:r>
-              <a:rPr lang="ko-KR" sz="1300">
-                <a:solidFill>
-                  <a:srgbClr val="1E1E1E"/>
-                </a:solidFill>
-              </a:rPr>
               <a:t>  고령층 UI 접근성 → Slow Banking UI (구간 선택, 큰 글씨, 고대비)</a:t>
-            </a:r>
-          </a:p>
-          <a:p>
-            <a:pPr marL="0" indent="0"/>
-            <a:r>
-              <a:rPr lang="ko-KR" sz="1300">
-                <a:solidFill>
-                  <a:srgbClr val="1E1E1E"/>
-                </a:solidFill>
-              </a:rPr>
-              <a:t>  GitHub: https://github.com/choseohyeon/JBagent</a:t>
             </a:r>
           </a:p>
           <a:p>

--- a/submit/[RF팀] 평생 자산관리 AI Agent MVP제안서.pptx
+++ b/submit/[RF팀] 평생 자산관리 AI Agent MVP제안서.pptx
@@ -12527,6 +12527,40 @@
           </a:prstGeom>
         </p:spPr>
       </p:pic>
+      <p:sp>
+        <p:nvSpPr>
+          <p:cNvPr id="95" name="TextBox 94"/>
+          <p:cNvSpPr txBox="1"/>
+          <p:nvPr/>
+        </p:nvSpPr>
+        <p:spPr>
+          <a:xfrm>
+            <a:off x="1581912" y="2331720"/>
+            <a:ext cx="9601200" cy="594360"/>
+          </a:xfrm>
+          <a:prstGeom prst="rect">
+            <a:avLst/>
+          </a:prstGeom>
+          <a:noFill/>
+        </p:spPr>
+        <p:txBody>
+          <a:bodyPr wrap="none">
+            <a:spAutoFit/>
+          </a:bodyPr>
+          <a:lstStyle/>
+          <a:p>
+            <a:pPr algn="ctr"/>
+            <a:r>
+              <a:rPr sz="3200" b="1">
+                <a:solidFill>
+                  <a:srgbClr val="1B4F8A"/>
+                </a:solidFill>
+              </a:rPr>
+              <a:t>평생 자산관리 AI Agent</a:t>
+            </a:r>
+          </a:p>
+        </p:txBody>
+      </p:sp>
     </p:spTree>
   </p:cSld>
   <p:clrMapOvr>

--- a/submit/[RF팀] 평생 자산관리 AI Agent MVP제안서.pptx
+++ b/submit/[RF팀] 평생 자산관리 AI Agent MVP제안서.pptx
@@ -12425,7 +12425,7 @@
         </p:nvSpPr>
         <p:spPr>
           <a:xfrm>
-            <a:off x="4645457" y="2802248"/>
+            <a:off x="4645457" y="3364992"/>
             <a:ext cx="2901085" cy="587813"/>
           </a:xfrm>
           <a:prstGeom prst="rect">
@@ -12535,8 +12535,8 @@
         </p:nvSpPr>
         <p:spPr>
           <a:xfrm>
-            <a:off x="1581912" y="2331720"/>
-            <a:ext cx="9601200" cy="594360"/>
+            <a:off x="1581912" y="2743200"/>
+            <a:ext cx="9601200" cy="548640"/>
           </a:xfrm>
           <a:prstGeom prst="rect">
             <a:avLst/>
@@ -12551,7 +12551,7 @@
           <a:p>
             <a:pPr algn="ctr"/>
             <a:r>
-              <a:rPr sz="3200" b="1">
+              <a:rPr sz="2600" b="1">
                 <a:solidFill>
                   <a:srgbClr val="1B4F8A"/>
                 </a:solidFill>
